--- a/Stein_Estimator.pptx
+++ b/Stein_Estimator.pptx
@@ -4737,8 +4737,8 @@
         </p:nvSpPr>
         <p:spPr>
           <a:xfrm>
-            <a:off x="232011" y="191068"/>
-            <a:ext cx="8475261" cy="892552"/>
+            <a:off x="109181" y="109182"/>
+            <a:ext cx="9403308" cy="1384995"/>
           </a:xfrm>
           <a:prstGeom prst="rect">
             <a:avLst/>
@@ -4779,7 +4779,25 @@
             </a:r>
             <a:r>
               <a:rPr lang="en-US" sz="1600" dirty="0"/>
-              <a:t> </a:t>
+              <a:t> gg</a:t>
+            </a:r>
+          </a:p>
+          <a:p>
+            <a:r>
+              <a:rPr lang="en-US" sz="1600" dirty="0"/>
+              <a:t>also these slides:</a:t>
+            </a:r>
+          </a:p>
+          <a:p>
+            <a:r>
+              <a:rPr lang="en-US" sz="1600" dirty="0">
+                <a:hlinkClick r:id="rId3"/>
+              </a:rPr>
+              <a:t>https://maxkasy.github.io/home/files/teaching/TopicsEconometrics2019/NormalShrinkage-Slides.pdf</a:t>
+            </a:r>
+            <a:r>
+              <a:rPr lang="en-US" sz="1600" dirty="0"/>
+              <a:t>  </a:t>
             </a:r>
           </a:p>
         </p:txBody>
@@ -4799,7 +4817,7 @@
           <p:nvPr/>
         </p:nvPicPr>
         <p:blipFill>
-          <a:blip r:embed="rId3" cstate="email">
+          <a:blip r:embed="rId4" cstate="email">
             <a:extLst>
               <a:ext uri="{28A0092B-C50C-407E-A947-70E740481C1C}">
                 <a14:useLocalDpi xmlns:a14="http://schemas.microsoft.com/office/drawing/2010/main"/>
@@ -4812,7 +4830,7 @@
         </p:blipFill>
         <p:spPr>
           <a:xfrm>
-            <a:off x="6741995" y="1542197"/>
+            <a:off x="7049133" y="1919099"/>
             <a:ext cx="5142867" cy="4938901"/>
           </a:xfrm>
           <a:prstGeom prst="rect">
@@ -4834,8 +4852,8 @@
         </p:nvSpPr>
         <p:spPr>
           <a:xfrm>
-            <a:off x="109182" y="1402785"/>
-            <a:ext cx="5732060" cy="5078313"/>
+            <a:off x="-1" y="1670505"/>
+            <a:ext cx="7165075" cy="4062651"/>
           </a:xfrm>
           <a:prstGeom prst="rect">
             <a:avLst/>
@@ -4876,15 +4894,13 @@
               <a:rPr lang="en-US" baseline="-25000" dirty="0" err="1"/>
               <a:t>i</a:t>
             </a:r>
-            <a:endParaRPr lang="en-US" baseline="-25000" dirty="0"/>
-          </a:p>
-          <a:p>
-            <a:endParaRPr lang="en-US" dirty="0"/>
-          </a:p>
-          <a:p>
-            <a:r>
-              <a:rPr lang="en-US" dirty="0"/>
-              <a:t>We want to find estimate for each </a:t>
+            <a:r>
+              <a:rPr lang="en-US" baseline="-25000" dirty="0"/>
+              <a:t> </a:t>
+            </a:r>
+            <a:r>
+              <a:rPr lang="en-US" dirty="0"/>
+              <a:t> . We want to find estimate for each </a:t>
             </a:r>
             <a:r>
               <a:rPr lang="el-GR" dirty="0"/>
@@ -4920,7 +4936,7 @@
             </a:r>
           </a:p>
           <a:p>
-            <a:endParaRPr lang="en-US" dirty="0"/>
+            <a:endParaRPr lang="en-US" sz="800" dirty="0"/>
           </a:p>
           <a:p>
             <a:r>
@@ -4929,18 +4945,57 @@
             </a:r>
           </a:p>
           <a:p>
-            <a:endParaRPr lang="en-US" dirty="0"/>
-          </a:p>
-          <a:p>
-            <a:r>
-              <a:rPr lang="en-US" dirty="0"/>
-              <a:t>But for k &gt;= 3 </a:t>
-            </a:r>
-          </a:p>
-          <a:p>
-            <a:r>
-              <a:rPr lang="en-US" dirty="0"/>
-              <a:t> E(X|</a:t>
+            <a:endParaRPr lang="en-US" sz="800" dirty="0"/>
+          </a:p>
+          <a:p>
+            <a:r>
+              <a:rPr lang="en-US" b="1" dirty="0">
+                <a:solidFill>
+                  <a:srgbClr val="FF0000"/>
+                </a:solidFill>
+              </a:rPr>
+              <a:t>But for k &gt;= 3 ,  E(X|</a:t>
+            </a:r>
+            <a:r>
+              <a:rPr lang="el-GR" b="1" dirty="0">
+                <a:solidFill>
+                  <a:srgbClr val="FF0000"/>
+                </a:solidFill>
+              </a:rPr>
+              <a:t>θ</a:t>
+            </a:r>
+            <a:r>
+              <a:rPr lang="en-US" b="1" dirty="0">
+                <a:solidFill>
+                  <a:srgbClr val="FF0000"/>
+                </a:solidFill>
+              </a:rPr>
+              <a:t>) is generally not same as E(</a:t>
+            </a:r>
+            <a:r>
+              <a:rPr lang="el-GR" b="1" dirty="0">
+                <a:solidFill>
+                  <a:srgbClr val="FF0000"/>
+                </a:solidFill>
+              </a:rPr>
+              <a:t>θ</a:t>
+            </a:r>
+            <a:r>
+              <a:rPr lang="en-US" b="1" dirty="0">
+                <a:solidFill>
+                  <a:srgbClr val="FF0000"/>
+                </a:solidFill>
+              </a:rPr>
+              <a:t>|X) .</a:t>
+            </a:r>
+          </a:p>
+          <a:p>
+            <a:endParaRPr lang="en-US" sz="800" dirty="0"/>
+          </a:p>
+          <a:p>
+            <a:r>
+              <a:rPr lang="en-US" dirty="0"/>
+              <a:t>X is distributed normally with mean </a:t>
             </a:r>
             <a:r>
               <a:rPr lang="el-GR" dirty="0"/>
@@ -4948,114 +5003,116 @@
             </a:r>
             <a:r>
               <a:rPr lang="en-US" dirty="0"/>
-              <a:t>) is generally not same as E(</a:t>
+              <a:t>, so E(X</a:t>
+            </a:r>
+            <a:r>
+              <a:rPr lang="en-US" baseline="-25000" dirty="0"/>
+              <a:t>i</a:t>
+            </a:r>
+            <a:r>
+              <a:rPr lang="en-US" dirty="0"/>
+              <a:t>|</a:t>
             </a:r>
             <a:r>
               <a:rPr lang="el-GR" dirty="0"/>
               <a:t>θ</a:t>
             </a:r>
             <a:r>
-              <a:rPr lang="en-US" dirty="0"/>
-              <a:t>|X) </a:t>
-            </a:r>
-          </a:p>
-          <a:p>
-            <a:endParaRPr lang="en-US" dirty="0"/>
-          </a:p>
-          <a:p>
-            <a:r>
-              <a:rPr lang="en-US" dirty="0"/>
-              <a:t>X is distributed normally with mean </a:t>
+              <a:rPr lang="en-US" baseline="-25000" dirty="0" err="1"/>
+              <a:t>i</a:t>
+            </a:r>
+            <a:r>
+              <a:rPr lang="en-US" dirty="0"/>
+              <a:t>) = </a:t>
             </a:r>
             <a:r>
               <a:rPr lang="el-GR" dirty="0"/>
               <a:t>θ</a:t>
             </a:r>
             <a:r>
-              <a:rPr lang="en-US" dirty="0"/>
-              <a:t>. </a:t>
-            </a:r>
-          </a:p>
-          <a:p>
-            <a:r>
-              <a:rPr lang="en-US" dirty="0"/>
-              <a:t>E(X</a:t>
-            </a:r>
-            <a:r>
-              <a:rPr lang="en-US" baseline="-25000" dirty="0"/>
+              <a:rPr lang="en-US" baseline="-25000" dirty="0" err="1"/>
               <a:t>i</a:t>
             </a:r>
-            <a:r>
-              <a:rPr lang="en-US" dirty="0"/>
-              <a:t>|</a:t>
+            <a:endParaRPr lang="en-US" dirty="0"/>
+          </a:p>
+          <a:p>
+            <a:r>
+              <a:rPr lang="en-US" dirty="0"/>
+              <a:t>So If we estimate X from </a:t>
             </a:r>
             <a:r>
               <a:rPr lang="el-GR" dirty="0"/>
               <a:t>θ</a:t>
             </a:r>
             <a:r>
+              <a:rPr lang="en-US" dirty="0"/>
+              <a:t> , we simply follow line </a:t>
+            </a:r>
+            <a:r>
+              <a:rPr lang="el-GR" dirty="0"/>
+              <a:t>θ</a:t>
+            </a:r>
+            <a:r>
+              <a:rPr lang="en-US" dirty="0"/>
+              <a:t> = X.</a:t>
+            </a:r>
+          </a:p>
+          <a:p>
+            <a:endParaRPr lang="en-US" dirty="0"/>
+          </a:p>
+          <a:p>
+            <a:r>
+              <a:rPr lang="en-US" dirty="0"/>
+              <a:t>But if we estimate </a:t>
+            </a:r>
+            <a:r>
+              <a:rPr lang="el-GR" dirty="0"/>
+              <a:t>θ</a:t>
+            </a:r>
+            <a:r>
+              <a:rPr lang="en-US" dirty="0"/>
+              <a:t> from X - then we will generally get different estimate of </a:t>
+            </a:r>
+            <a:r>
+              <a:rPr lang="el-GR" dirty="0"/>
+              <a:t>θ</a:t>
+            </a:r>
+            <a:r>
+              <a:rPr lang="en-US" dirty="0"/>
+              <a:t>. JS estimator shrinkage is derived by finding estimators of the form </a:t>
+            </a:r>
+          </a:p>
+          <a:p>
+            <a:r>
+              <a:rPr lang="en-US" dirty="0"/>
+              <a:t>    </a:t>
+            </a:r>
+            <a:r>
+              <a:rPr lang="el-GR" dirty="0"/>
+              <a:t>θ</a:t>
+            </a:r>
+            <a:r>
               <a:rPr lang="en-US" baseline="-25000" dirty="0" err="1"/>
               <a:t>i</a:t>
             </a:r>
             <a:r>
               <a:rPr lang="en-US" dirty="0"/>
-              <a:t>) = </a:t>
-            </a:r>
-            <a:r>
-              <a:rPr lang="el-GR" dirty="0"/>
-              <a:t>θ</a:t>
+              <a:t> = </a:t>
+            </a:r>
+            <a:r>
+              <a:rPr lang="en-US" dirty="0" err="1"/>
+              <a:t>a+b·X</a:t>
             </a:r>
             <a:r>
               <a:rPr lang="en-US" baseline="-25000" dirty="0" err="1"/>
               <a:t>i</a:t>
             </a:r>
-            <a:endParaRPr lang="en-US" dirty="0"/>
-          </a:p>
-          <a:p>
-            <a:r>
-              <a:rPr lang="en-US" dirty="0"/>
-              <a:t>So If we estimate X from </a:t>
-            </a:r>
-            <a:r>
-              <a:rPr lang="el-GR" dirty="0"/>
-              <a:t>θ</a:t>
-            </a:r>
-            <a:r>
-              <a:rPr lang="en-US" dirty="0"/>
-              <a:t> , we simply follow line </a:t>
-            </a:r>
-            <a:r>
-              <a:rPr lang="el-GR" dirty="0"/>
-              <a:t>θ</a:t>
-            </a:r>
-            <a:r>
-              <a:rPr lang="en-US" dirty="0"/>
-              <a:t> = X.</a:t>
-            </a:r>
-          </a:p>
-          <a:p>
-            <a:endParaRPr lang="en-US" dirty="0"/>
-          </a:p>
-          <a:p>
-            <a:r>
-              <a:rPr lang="en-US" dirty="0"/>
-              <a:t>But if we estimate </a:t>
-            </a:r>
-            <a:r>
-              <a:rPr lang="el-GR" dirty="0"/>
-              <a:t>θ</a:t>
-            </a:r>
-            <a:r>
-              <a:rPr lang="en-US" dirty="0"/>
-              <a:t> from X - then we will generally get different estimate of </a:t>
-            </a:r>
-            <a:r>
-              <a:rPr lang="el-GR" dirty="0"/>
-              <a:t>θ</a:t>
-            </a:r>
-            <a:r>
-              <a:rPr lang="en-US" dirty="0"/>
-              <a:t>.</a:t>
+            <a:endParaRPr lang="en-US" baseline="-25000" dirty="0"/>
+          </a:p>
+          <a:p>
+            <a:r>
+              <a:rPr lang="en-US" dirty="0"/>
+              <a:t>and finding values of a and b that minimize loss.</a:t>
             </a:r>
           </a:p>
         </p:txBody>

--- a/Stein_Estimator.pptx
+++ b/Stein_Estimator.pptx
@@ -263,7 +263,7 @@
           <a:p>
             <a:fld id="{EE65A1C1-DAB8-144D-91BF-92D4901901FF}" type="datetimeFigureOut">
               <a:rPr lang="en-US" smtClean="0"/>
-              <a:t>3/9/20</a:t>
+              <a:t>3/11/20</a:t>
             </a:fld>
             <a:endParaRPr lang="en-US"/>
           </a:p>
@@ -461,7 +461,7 @@
           <a:p>
             <a:fld id="{EE65A1C1-DAB8-144D-91BF-92D4901901FF}" type="datetimeFigureOut">
               <a:rPr lang="en-US" smtClean="0"/>
-              <a:t>3/9/20</a:t>
+              <a:t>3/11/20</a:t>
             </a:fld>
             <a:endParaRPr lang="en-US"/>
           </a:p>
@@ -669,7 +669,7 @@
           <a:p>
             <a:fld id="{EE65A1C1-DAB8-144D-91BF-92D4901901FF}" type="datetimeFigureOut">
               <a:rPr lang="en-US" smtClean="0"/>
-              <a:t>3/9/20</a:t>
+              <a:t>3/11/20</a:t>
             </a:fld>
             <a:endParaRPr lang="en-US"/>
           </a:p>
@@ -867,7 +867,7 @@
           <a:p>
             <a:fld id="{EE65A1C1-DAB8-144D-91BF-92D4901901FF}" type="datetimeFigureOut">
               <a:rPr lang="en-US" smtClean="0"/>
-              <a:t>3/9/20</a:t>
+              <a:t>3/11/20</a:t>
             </a:fld>
             <a:endParaRPr lang="en-US"/>
           </a:p>
@@ -1142,7 +1142,7 @@
           <a:p>
             <a:fld id="{EE65A1C1-DAB8-144D-91BF-92D4901901FF}" type="datetimeFigureOut">
               <a:rPr lang="en-US" smtClean="0"/>
-              <a:t>3/9/20</a:t>
+              <a:t>3/11/20</a:t>
             </a:fld>
             <a:endParaRPr lang="en-US"/>
           </a:p>
@@ -1407,7 +1407,7 @@
           <a:p>
             <a:fld id="{EE65A1C1-DAB8-144D-91BF-92D4901901FF}" type="datetimeFigureOut">
               <a:rPr lang="en-US" smtClean="0"/>
-              <a:t>3/9/20</a:t>
+              <a:t>3/11/20</a:t>
             </a:fld>
             <a:endParaRPr lang="en-US"/>
           </a:p>
@@ -1819,7 +1819,7 @@
           <a:p>
             <a:fld id="{EE65A1C1-DAB8-144D-91BF-92D4901901FF}" type="datetimeFigureOut">
               <a:rPr lang="en-US" smtClean="0"/>
-              <a:t>3/9/20</a:t>
+              <a:t>3/11/20</a:t>
             </a:fld>
             <a:endParaRPr lang="en-US"/>
           </a:p>
@@ -1960,7 +1960,7 @@
           <a:p>
             <a:fld id="{EE65A1C1-DAB8-144D-91BF-92D4901901FF}" type="datetimeFigureOut">
               <a:rPr lang="en-US" smtClean="0"/>
-              <a:t>3/9/20</a:t>
+              <a:t>3/11/20</a:t>
             </a:fld>
             <a:endParaRPr lang="en-US"/>
           </a:p>
@@ -2073,7 +2073,7 @@
           <a:p>
             <a:fld id="{EE65A1C1-DAB8-144D-91BF-92D4901901FF}" type="datetimeFigureOut">
               <a:rPr lang="en-US" smtClean="0"/>
-              <a:t>3/9/20</a:t>
+              <a:t>3/11/20</a:t>
             </a:fld>
             <a:endParaRPr lang="en-US"/>
           </a:p>
@@ -2384,7 +2384,7 @@
           <a:p>
             <a:fld id="{EE65A1C1-DAB8-144D-91BF-92D4901901FF}" type="datetimeFigureOut">
               <a:rPr lang="en-US" smtClean="0"/>
-              <a:t>3/9/20</a:t>
+              <a:t>3/11/20</a:t>
             </a:fld>
             <a:endParaRPr lang="en-US"/>
           </a:p>
@@ -2672,7 +2672,7 @@
           <a:p>
             <a:fld id="{EE65A1C1-DAB8-144D-91BF-92D4901901FF}" type="datetimeFigureOut">
               <a:rPr lang="en-US" smtClean="0"/>
-              <a:t>3/9/20</a:t>
+              <a:t>3/11/20</a:t>
             </a:fld>
             <a:endParaRPr lang="en-US"/>
           </a:p>
@@ -2913,7 +2913,7 @@
           <a:p>
             <a:fld id="{EE65A1C1-DAB8-144D-91BF-92D4901901FF}" type="datetimeFigureOut">
               <a:rPr lang="en-US" smtClean="0"/>
-              <a:t>3/9/20</a:t>
+              <a:t>3/11/20</a:t>
             </a:fld>
             <a:endParaRPr lang="en-US"/>
           </a:p>
@@ -4276,7 +4276,7 @@
           <a:p>
             <a:r>
               <a:rPr lang="en-US" dirty="0"/>
-              <a:t>In the Scientific American article, </a:t>
+              <a:t>In this "Scientific American" article, </a:t>
             </a:r>
             <a:r>
               <a:rPr lang="en-US" dirty="0" err="1"/>
@@ -5295,7 +5295,7 @@
           <a:p>
             <a:r>
               <a:rPr lang="en-US" dirty="0"/>
-              <a:t>Note: the abbreviation "SURE" may also relate to "Seemingly Unrelated Regression Equations" describing the SUR model proposed by Arnold Zellner in (1962.</a:t>
+              <a:t>Note: the abbreviation "SURE" may also relate to "Seemingly Unrelated Regression Equations" describing the SUR model proposed by Arnold Zellner in 1962.</a:t>
             </a:r>
           </a:p>
         </p:txBody>

--- a/Stein_Estimator.pptx
+++ b/Stein_Estimator.pptx
@@ -4231,7 +4231,7 @@
         <p:spPr>
           <a:xfrm>
             <a:off x="110611" y="3743553"/>
-            <a:ext cx="11850331" cy="1754326"/>
+            <a:ext cx="11850331" cy="2031325"/>
           </a:xfrm>
           <a:prstGeom prst="rect">
             <a:avLst/>
@@ -4284,47 +4284,17 @@
             </a:r>
             <a:r>
               <a:rPr lang="en-US" dirty="0"/>
-              <a:t> explained the paradox with a baseball example: while most people would think the best prediction for the end-of-season batting averages of 10 players would be obtained by looking at each player's early average, the James-Stein theorem showed that including other players' averages leads to a better result. This is a paradox because players' individual performances shouldn't influence each other.</a:t>
-            </a:r>
-          </a:p>
-        </p:txBody>
-      </p:sp>
-      <p:pic>
-        <p:nvPicPr>
-          <p:cNvPr id="3" name="Picture 2">
-            <a:extLst>
-              <a:ext uri="{FF2B5EF4-FFF2-40B4-BE49-F238E27FC236}">
-                <a16:creationId xmlns:a16="http://schemas.microsoft.com/office/drawing/2014/main" id="{353A0A3F-4666-5649-8724-5FD32F1D76B0}"/>
-              </a:ext>
-            </a:extLst>
-          </p:cNvPr>
-          <p:cNvPicPr>
-            <a:picLocks noChangeAspect="1"/>
-          </p:cNvPicPr>
-          <p:nvPr/>
-        </p:nvPicPr>
-        <p:blipFill>
-          <a:blip r:embed="rId7" cstate="email">
-            <a:extLst>
-              <a:ext uri="{28A0092B-C50C-407E-A947-70E740481C1C}">
-                <a14:useLocalDpi xmlns:a14="http://schemas.microsoft.com/office/drawing/2010/main"/>
-              </a:ext>
-            </a:extLst>
-          </a:blip>
-          <a:stretch>
-            <a:fillRect/>
-          </a:stretch>
-        </p:blipFill>
-        <p:spPr>
-          <a:xfrm>
-            <a:off x="3622776" y="5571132"/>
-            <a:ext cx="4826000" cy="1155700"/>
-          </a:xfrm>
-          <a:prstGeom prst="rect">
-            <a:avLst/>
-          </a:prstGeom>
-        </p:spPr>
-      </p:pic>
+              <a:t> explained the paradox with a baseball example: while most people would think the best prediction for the end-of-season batting averages of 10 players would be obtained by looking at each player's early average, the James-Stein theorem showed that including other players' averages leads to a better result. This is a paradox because players' individual performances shouldn't influence each other. </a:t>
+            </a:r>
+          </a:p>
+          <a:p>
+            <a:r>
+              <a:rPr lang="en-US" dirty="0"/>
+              <a:t>The picture above shows the shrinking of individual batting averages toward the overall "average of averages" by ~80% .</a:t>
+            </a:r>
+          </a:p>
+        </p:txBody>
+      </p:sp>
     </p:spTree>
     <p:extLst>
       <p:ext uri="{BB962C8B-B14F-4D97-AF65-F5344CB8AC3E}">

--- a/Stein_Estimator.pptx
+++ b/Stein_Estimator.pptx
@@ -6,9 +6,9 @@
   </p:sldMasterIdLst>
   <p:sldIdLst>
     <p:sldId id="256" r:id="rId2"/>
-    <p:sldId id="257" r:id="rId3"/>
+    <p:sldId id="260" r:id="rId3"/>
     <p:sldId id="258" r:id="rId4"/>
-    <p:sldId id="260" r:id="rId5"/>
+    <p:sldId id="257" r:id="rId5"/>
     <p:sldId id="259" r:id="rId6"/>
   </p:sldIdLst>
   <p:sldSz cx="12192000" cy="6858000"/>
@@ -3344,8 +3344,8 @@
         </p:nvSpPr>
         <p:spPr>
           <a:xfrm>
-            <a:off x="0" y="546746"/>
-            <a:ext cx="9461091" cy="3139321"/>
+            <a:off x="0" y="360180"/>
+            <a:ext cx="10424694" cy="4124206"/>
           </a:xfrm>
           <a:prstGeom prst="rect">
             <a:avLst/>
@@ -3360,13 +3360,7 @@
           <a:p>
             <a:r>
               <a:rPr lang="en-US" dirty="0"/>
-              <a:t>Stein's Example (paradox, phenomenon)</a:t>
-            </a:r>
-          </a:p>
-          <a:p>
-            <a:r>
-              <a:rPr lang="en-US" dirty="0"/>
-              <a:t> - </a:t>
+              <a:t>Stein's Example (paradox, phenomenon) - </a:t>
             </a:r>
             <a:r>
               <a:rPr lang="en-US" dirty="0">
@@ -3378,51 +3372,135 @@
           </a:p>
           <a:p>
             <a:r>
-              <a:rPr lang="en-US" dirty="0">
+              <a:rPr lang="en-US" sz="1600" dirty="0">
                 <a:solidFill>
                   <a:srgbClr val="00B050"/>
                 </a:solidFill>
                 <a:latin typeface="Consolas" panose="020B0609020204030204" pitchFamily="49" charset="0"/>
                 <a:cs typeface="Consolas" panose="020B0609020204030204" pitchFamily="49" charset="0"/>
               </a:rPr>
-              <a:t>    when three or more parameters are estimated simultaneously, </a:t>
-            </a:r>
-          </a:p>
-          <a:p>
-            <a:r>
-              <a:rPr lang="en-US" dirty="0">
+              <a:t>Suppose we have random m-dimensional vector </a:t>
+            </a:r>
+            <a:r>
+              <a:rPr lang="en-US" sz="1600" b="1" dirty="0">
+                <a:solidFill>
+                  <a:srgbClr val="FF0000"/>
+                </a:solidFill>
+                <a:latin typeface="Consolas" panose="020B0609020204030204" pitchFamily="49" charset="0"/>
+                <a:cs typeface="Consolas" panose="020B0609020204030204" pitchFamily="49" charset="0"/>
+              </a:rPr>
+              <a:t>Y</a:t>
+            </a:r>
+            <a:r>
+              <a:rPr lang="en-US" sz="1600" dirty="0">
                 <a:solidFill>
                   <a:srgbClr val="00B050"/>
                 </a:solidFill>
                 <a:latin typeface="Consolas" panose="020B0609020204030204" pitchFamily="49" charset="0"/>
                 <a:cs typeface="Consolas" panose="020B0609020204030204" pitchFamily="49" charset="0"/>
               </a:rPr>
-              <a:t>    there exist combined estimators more accurate on average </a:t>
-            </a:r>
-          </a:p>
-          <a:p>
-            <a:r>
-              <a:rPr lang="en-US" dirty="0">
+              <a:t>, where m &gt;= 3, all components are normally distributed with sigma=1 and mutually independent from each other. Suppose the vector </a:t>
+            </a:r>
+            <a:r>
+              <a:rPr lang="el-GR" sz="1600" b="1" dirty="0">
+                <a:solidFill>
+                  <a:srgbClr val="FF0000"/>
+                </a:solidFill>
+              </a:rPr>
+              <a:t>θ</a:t>
+            </a:r>
+            <a:r>
+              <a:rPr lang="en-US" sz="1600" dirty="0">
                 <a:solidFill>
                   <a:srgbClr val="00B050"/>
                 </a:solidFill>
                 <a:latin typeface="Consolas" panose="020B0609020204030204" pitchFamily="49" charset="0"/>
                 <a:cs typeface="Consolas" panose="020B0609020204030204" pitchFamily="49" charset="0"/>
               </a:rPr>
-              <a:t>    than any method that handles the parameters separately. </a:t>
-            </a:r>
-            <a:endParaRPr lang="en-US" dirty="0"/>
-          </a:p>
-          <a:p>
-            <a:r>
-              <a:rPr lang="en-US" dirty="0"/>
-              <a:t>It is named after Charles Stein of Stanford University, who discovered the phenomenon in 1955</a:t>
-            </a:r>
-          </a:p>
-          <a:p>
-            <a:r>
-              <a:rPr lang="en-US" dirty="0"/>
-              <a:t>and further developed with Stein's graduate student Willard James).</a:t>
+              <a:t> is the unknown mean vector of mean values of components of Y.</a:t>
+            </a:r>
+          </a:p>
+          <a:p>
+            <a:r>
+              <a:rPr lang="en-US" sz="1600" dirty="0">
+                <a:solidFill>
+                  <a:srgbClr val="00B050"/>
+                </a:solidFill>
+                <a:latin typeface="Consolas" panose="020B0609020204030204" pitchFamily="49" charset="0"/>
+                <a:cs typeface="Consolas" panose="020B0609020204030204" pitchFamily="49" charset="0"/>
+              </a:rPr>
+              <a:t>Suppose we want to estimate </a:t>
+            </a:r>
+            <a:r>
+              <a:rPr lang="el-GR" sz="1600" b="1" dirty="0">
+                <a:solidFill>
+                  <a:srgbClr val="FF0000"/>
+                </a:solidFill>
+              </a:rPr>
+              <a:t>θ</a:t>
+            </a:r>
+            <a:r>
+              <a:rPr lang="en-US" sz="1600" dirty="0">
+                <a:solidFill>
+                  <a:srgbClr val="00B050"/>
+                </a:solidFill>
+                <a:latin typeface="Consolas" panose="020B0609020204030204" pitchFamily="49" charset="0"/>
+                <a:cs typeface="Consolas" panose="020B0609020204030204" pitchFamily="49" charset="0"/>
+              </a:rPr>
+              <a:t> based on a single observation of </a:t>
+            </a:r>
+            <a:r>
+              <a:rPr lang="en-US" sz="1600" b="1" dirty="0">
+                <a:solidFill>
+                  <a:srgbClr val="FF0000"/>
+                </a:solidFill>
+                <a:latin typeface="Consolas" panose="020B0609020204030204" pitchFamily="49" charset="0"/>
+                <a:cs typeface="Consolas" panose="020B0609020204030204" pitchFamily="49" charset="0"/>
+              </a:rPr>
+              <a:t>Y</a:t>
+            </a:r>
+            <a:r>
+              <a:rPr lang="en-US" sz="1600" dirty="0">
+                <a:solidFill>
+                  <a:srgbClr val="00B050"/>
+                </a:solidFill>
+                <a:latin typeface="Consolas" panose="020B0609020204030204" pitchFamily="49" charset="0"/>
+                <a:cs typeface="Consolas" panose="020B0609020204030204" pitchFamily="49" charset="0"/>
+              </a:rPr>
+              <a:t>. As the components are independent, you would think that your best bet is to use values of </a:t>
+            </a:r>
+            <a:r>
+              <a:rPr lang="en-US" sz="1600" b="1" dirty="0">
+                <a:solidFill>
+                  <a:srgbClr val="FF0000"/>
+                </a:solidFill>
+                <a:latin typeface="Consolas" panose="020B0609020204030204" pitchFamily="49" charset="0"/>
+                <a:cs typeface="Consolas" panose="020B0609020204030204" pitchFamily="49" charset="0"/>
+              </a:rPr>
+              <a:t>Y</a:t>
+            </a:r>
+            <a:r>
+              <a:rPr lang="en-US" sz="1600" dirty="0">
+                <a:solidFill>
+                  <a:srgbClr val="00B050"/>
+                </a:solidFill>
+                <a:latin typeface="Consolas" panose="020B0609020204030204" pitchFamily="49" charset="0"/>
+                <a:cs typeface="Consolas" panose="020B0609020204030204" pitchFamily="49" charset="0"/>
+              </a:rPr>
+              <a:t> for that estimation. But actually there is a combined JS estimate which is better (on average), mostly because it reduces the influence of individual outliers by combining (mixing-in) the values from other independent components of the same sample observation vector. </a:t>
+            </a:r>
+            <a:br>
+              <a:rPr lang="en-US" sz="1600" dirty="0">
+                <a:solidFill>
+                  <a:srgbClr val="00B050"/>
+                </a:solidFill>
+                <a:latin typeface="Consolas" panose="020B0609020204030204" pitchFamily="49" charset="0"/>
+                <a:cs typeface="Consolas" panose="020B0609020204030204" pitchFamily="49" charset="0"/>
+              </a:rPr>
+            </a:br>
+            <a:r>
+              <a:rPr lang="en-US" dirty="0"/>
+              <a:t>This estimator is named after Charles Stein of Stanford University, who discovered the phenomenon in 1955, and further developed with Stein's graduate student Willard James).</a:t>
             </a:r>
           </a:p>
           <a:p>
@@ -3466,7 +3544,7 @@
           <a:p>
             <a:r>
               <a:rPr lang="en-US" dirty="0"/>
-              <a:t>Important Note: It doesn't work for 2 parameters, it should be 3 or more.</a:t>
+              <a:t>Important Note: It doesn't work for m=2 dimensions, it should be 3 dimensions, or more.</a:t>
             </a:r>
           </a:p>
         </p:txBody>
@@ -3498,7 +3576,7 @@
         </p:blipFill>
         <p:spPr>
           <a:xfrm>
-            <a:off x="10124077" y="360180"/>
+            <a:off x="10605857" y="34865"/>
             <a:ext cx="1586143" cy="2125557"/>
           </a:xfrm>
           <a:prstGeom prst="rect">
@@ -3520,7 +3598,7 @@
         </p:nvSpPr>
         <p:spPr>
           <a:xfrm>
-            <a:off x="0" y="98571"/>
+            <a:off x="-60929" y="-52146"/>
             <a:ext cx="3605982" cy="523220"/>
           </a:xfrm>
           <a:prstGeom prst="rect">
@@ -3555,8 +3633,8 @@
         </p:nvSpPr>
         <p:spPr>
           <a:xfrm>
-            <a:off x="10020841" y="2485738"/>
-            <a:ext cx="1961535" cy="923330"/>
+            <a:off x="10424694" y="2223855"/>
+            <a:ext cx="1767306" cy="1200329"/>
           </a:xfrm>
           <a:prstGeom prst="rect">
             <a:avLst/>
@@ -3569,21 +3647,31 @@
           </a:bodyPr>
           <a:lstStyle/>
           <a:p>
+            <a:pPr algn="ctr"/>
             <a:r>
               <a:rPr lang="en-US" dirty="0"/>
               <a:t>Charles M. Stein</a:t>
             </a:r>
           </a:p>
           <a:p>
+            <a:pPr algn="ctr"/>
             <a:r>
               <a:rPr lang="en-US" dirty="0"/>
               <a:t>   ( 1920-2016 )</a:t>
             </a:r>
           </a:p>
           <a:p>
-            <a:r>
-              <a:rPr lang="en-US" dirty="0"/>
-              <a:t>Statistics, Stanford</a:t>
+            <a:pPr algn="ctr"/>
+            <a:r>
+              <a:rPr lang="en-US" dirty="0"/>
+              <a:t>Statistics, </a:t>
+            </a:r>
+          </a:p>
+          <a:p>
+            <a:pPr algn="ctr"/>
+            <a:r>
+              <a:rPr lang="en-US" dirty="0"/>
+              <a:t>Stanford</a:t>
             </a:r>
           </a:p>
         </p:txBody>
@@ -3602,8 +3690,8 @@
         </p:nvSpPr>
         <p:spPr>
           <a:xfrm>
-            <a:off x="0" y="5288340"/>
-            <a:ext cx="12078269" cy="1569660"/>
+            <a:off x="32250" y="6038176"/>
+            <a:ext cx="9036799" cy="830997"/>
           </a:xfrm>
           <a:prstGeom prst="rect">
             <a:avLst/>
@@ -3617,102 +3705,16 @@
           <a:lstStyle/>
           <a:p>
             <a:r>
-              <a:rPr lang="en-US" sz="1600" dirty="0"/>
-              <a:t>A quirky example would be estimating the three unrelated things together: speed of light, tea consumption in Taiwan, hog weight in Montana</a:t>
-            </a:r>
-          </a:p>
-          <a:p>
-            <a:r>
-              <a:rPr lang="en-US" sz="1600" dirty="0"/>
-              <a:t>The total MSE (the sum of individual Mean Square Errors) in measuring light speed, tea consumption, and hog weight would improve by using the James–Stein estimator. </a:t>
-            </a:r>
-          </a:p>
-          <a:p>
-            <a:r>
-              <a:rPr lang="en-US" sz="1600" dirty="0"/>
-              <a:t>However, any particular component (such as the speed of light) would improve for some parameter values, and deteriorate for others. </a:t>
-            </a:r>
-          </a:p>
-          <a:p>
-            <a:r>
-              <a:rPr lang="en-US" sz="1600" dirty="0"/>
-              <a:t>Thus, although the James–Stein estimator dominates the LS estimator when three or more parameters are estimated, any single component does NOT dominate the respective component of the LS estimator.</a:t>
-            </a:r>
-          </a:p>
-        </p:txBody>
-      </p:sp>
-      <p:pic>
-        <p:nvPicPr>
-          <p:cNvPr id="2" name="Picture 1">
-            <a:extLst>
-              <a:ext uri="{FF2B5EF4-FFF2-40B4-BE49-F238E27FC236}">
-                <a16:creationId xmlns:a16="http://schemas.microsoft.com/office/drawing/2014/main" id="{C21FDEB3-7C6C-7648-8FC2-1C338E947787}"/>
-              </a:ext>
-            </a:extLst>
-          </p:cNvPr>
-          <p:cNvPicPr>
-            <a:picLocks noChangeAspect="1"/>
-          </p:cNvPicPr>
-          <p:nvPr/>
-        </p:nvPicPr>
-        <p:blipFill>
-          <a:blip r:embed="rId6" cstate="email">
-            <a:extLst>
-              <a:ext uri="{28A0092B-C50C-407E-A947-70E740481C1C}">
-                <a14:useLocalDpi xmlns:a14="http://schemas.microsoft.com/office/drawing/2010/main"/>
-              </a:ext>
-            </a:extLst>
-          </a:blip>
-          <a:stretch>
-            <a:fillRect/>
-          </a:stretch>
-        </p:blipFill>
-        <p:spPr>
-          <a:xfrm>
-            <a:off x="5194841" y="4069346"/>
-            <a:ext cx="4826000" cy="1155700"/>
-          </a:xfrm>
-          <a:prstGeom prst="rect">
-            <a:avLst/>
-          </a:prstGeom>
-        </p:spPr>
-      </p:pic>
-      <p:pic>
-        <p:nvPicPr>
-          <p:cNvPr id="3" name="Picture 2">
-            <a:extLst>
-              <a:ext uri="{FF2B5EF4-FFF2-40B4-BE49-F238E27FC236}">
-                <a16:creationId xmlns:a16="http://schemas.microsoft.com/office/drawing/2014/main" id="{0C938D22-20F4-2245-9845-7E23C37A770D}"/>
-              </a:ext>
-            </a:extLst>
-          </p:cNvPr>
-          <p:cNvPicPr>
-            <a:picLocks noChangeAspect="1"/>
-          </p:cNvPicPr>
-          <p:nvPr/>
-        </p:nvPicPr>
-        <p:blipFill>
-          <a:blip r:embed="rId7" cstate="email">
-            <a:extLst>
-              <a:ext uri="{28A0092B-C50C-407E-A947-70E740481C1C}">
-                <a14:useLocalDpi xmlns:a14="http://schemas.microsoft.com/office/drawing/2010/main"/>
-              </a:ext>
-            </a:extLst>
-          </a:blip>
-          <a:stretch>
-            <a:fillRect/>
-          </a:stretch>
-        </p:blipFill>
-        <p:spPr>
-          <a:xfrm>
-            <a:off x="124062" y="4087298"/>
-            <a:ext cx="1727200" cy="762000"/>
-          </a:xfrm>
-          <a:prstGeom prst="rect">
-            <a:avLst/>
-          </a:prstGeom>
-        </p:spPr>
-      </p:pic>
+              <a:rPr lang="en-US" sz="1600" dirty="0">
+                <a:solidFill>
+                  <a:srgbClr val="00B050"/>
+                </a:solidFill>
+              </a:rPr>
+              <a:t>A quirky example would be estimating the three unrelated values together (given a sample): speed of light, tea consumption in Taiwan, hog weight in Montana. Note that any particular component (such as the speed of light, for example) would improve for some parameter values, and deteriorate for others. </a:t>
+            </a:r>
+          </a:p>
+        </p:txBody>
+      </p:sp>
       <p:sp>
         <p:nvSpPr>
           <p:cNvPr id="6" name="TextBox 5">
@@ -3727,8 +3729,8 @@
         </p:nvSpPr>
         <p:spPr>
           <a:xfrm>
-            <a:off x="175166" y="3680880"/>
-            <a:ext cx="3250422" cy="369332"/>
+            <a:off x="-14682" y="4399483"/>
+            <a:ext cx="3250422" cy="584775"/>
           </a:xfrm>
           <a:prstGeom prst="rect">
             <a:avLst/>
@@ -3742,7 +3744,7 @@
           <a:lstStyle/>
           <a:p>
             <a:r>
-              <a:rPr lang="en-US" b="1" dirty="0">
+              <a:rPr lang="en-US" sz="1600" b="1" dirty="0">
                 <a:solidFill>
                   <a:srgbClr val="FF0000"/>
                 </a:solidFill>
@@ -3750,6 +3752,16 @@
               <a:t>Maximum likelihood Estimation</a:t>
             </a:r>
           </a:p>
+          <a:p>
+            <a:r>
+              <a:rPr lang="en-US" sz="1600" b="1" dirty="0">
+                <a:solidFill>
+                  <a:srgbClr val="FF0000"/>
+                </a:solidFill>
+              </a:rPr>
+              <a:t>(LS = Least Squares)</a:t>
+            </a:r>
+          </a:p>
         </p:txBody>
       </p:sp>
       <p:sp>
@@ -3766,7 +3778,7 @@
         </p:nvSpPr>
         <p:spPr>
           <a:xfrm>
-            <a:off x="5148963" y="3668703"/>
+            <a:off x="3235740" y="4376553"/>
             <a:ext cx="4487294" cy="369332"/>
           </a:xfrm>
           <a:prstGeom prst="rect">
@@ -3821,8 +3833,8 @@
         </p:nvSpPr>
         <p:spPr>
           <a:xfrm>
-            <a:off x="2526766" y="4442610"/>
-            <a:ext cx="1185426" cy="646331"/>
+            <a:off x="8247657" y="4712992"/>
+            <a:ext cx="925163" cy="646331"/>
           </a:xfrm>
           <a:prstGeom prst="rect">
             <a:avLst/>
@@ -3841,17 +3853,22 @@
                   <a:srgbClr val="FF0000"/>
                 </a:solidFill>
               </a:rPr>
-              <a:t>Vector of </a:t>
-            </a:r>
-          </a:p>
-          <a:p>
-            <a:r>
+              <a:t>sample</a:t>
+            </a:r>
+            <a:br>
               <a:rPr lang="en-US" dirty="0">
                 <a:solidFill>
                   <a:srgbClr val="FF0000"/>
                 </a:solidFill>
               </a:rPr>
-              <a:t>Averages</a:t>
+            </a:br>
+            <a:r>
+              <a:rPr lang="en-US" dirty="0">
+                <a:solidFill>
+                  <a:srgbClr val="FF0000"/>
+                </a:solidFill>
+              </a:rPr>
+              <a:t>vector</a:t>
             </a:r>
           </a:p>
         </p:txBody>
@@ -3869,8 +3886,8 @@
           <p:nvPr/>
         </p:nvSpPr>
         <p:spPr>
-          <a:xfrm rot="11774949">
-            <a:off x="1875593" y="4521439"/>
+          <a:xfrm rot="9051664">
+            <a:off x="7607263" y="5080472"/>
             <a:ext cx="600501" cy="259628"/>
           </a:xfrm>
           <a:prstGeom prst="rightArrow">
@@ -3902,12 +3919,72 @@
           </a:p>
         </p:txBody>
       </p:sp>
-      <p:sp>
-        <p:nvSpPr>
-          <p:cNvPr id="13" name="TextBox 12">
-            <a:extLst>
-              <a:ext uri="{FF2B5EF4-FFF2-40B4-BE49-F238E27FC236}">
-                <a16:creationId xmlns:a16="http://schemas.microsoft.com/office/drawing/2014/main" id="{AE8F6750-101C-A640-A65F-C8D160848286}"/>
+      <p:pic>
+        <p:nvPicPr>
+          <p:cNvPr id="17" name="Picture 16">
+            <a:extLst>
+              <a:ext uri="{FF2B5EF4-FFF2-40B4-BE49-F238E27FC236}">
+                <a16:creationId xmlns:a16="http://schemas.microsoft.com/office/drawing/2014/main" id="{16BEFFB1-7AB7-F747-90DB-9D0D01D2D318}"/>
+              </a:ext>
+            </a:extLst>
+          </p:cNvPr>
+          <p:cNvPicPr>
+            <a:picLocks noChangeAspect="1"/>
+          </p:cNvPicPr>
+          <p:nvPr/>
+        </p:nvPicPr>
+        <p:blipFill>
+          <a:blip r:embed="rId6"/>
+          <a:stretch>
+            <a:fillRect/>
+          </a:stretch>
+        </p:blipFill>
+        <p:spPr>
+          <a:xfrm>
+            <a:off x="3480868" y="4691976"/>
+            <a:ext cx="4025900" cy="1346200"/>
+          </a:xfrm>
+          <a:prstGeom prst="rect">
+            <a:avLst/>
+          </a:prstGeom>
+        </p:spPr>
+      </p:pic>
+      <p:pic>
+        <p:nvPicPr>
+          <p:cNvPr id="18" name="Picture 17">
+            <a:extLst>
+              <a:ext uri="{FF2B5EF4-FFF2-40B4-BE49-F238E27FC236}">
+                <a16:creationId xmlns:a16="http://schemas.microsoft.com/office/drawing/2014/main" id="{A597F48E-9A54-7A40-9A20-1CDD1EDCBC24}"/>
+              </a:ext>
+            </a:extLst>
+          </p:cNvPr>
+          <p:cNvPicPr>
+            <a:picLocks noChangeAspect="1"/>
+          </p:cNvPicPr>
+          <p:nvPr/>
+        </p:nvPicPr>
+        <p:blipFill>
+          <a:blip r:embed="rId7"/>
+          <a:stretch>
+            <a:fillRect/>
+          </a:stretch>
+        </p:blipFill>
+        <p:spPr>
+          <a:xfrm>
+            <a:off x="537359" y="5099931"/>
+            <a:ext cx="1219200" cy="584200"/>
+          </a:xfrm>
+          <a:prstGeom prst="rect">
+            <a:avLst/>
+          </a:prstGeom>
+        </p:spPr>
+      </p:pic>
+      <p:sp>
+        <p:nvSpPr>
+          <p:cNvPr id="19" name="TextBox 18">
+            <a:extLst>
+              <a:ext uri="{FF2B5EF4-FFF2-40B4-BE49-F238E27FC236}">
+                <a16:creationId xmlns:a16="http://schemas.microsoft.com/office/drawing/2014/main" id="{FAF5D9E0-8D7E-044D-9D66-BC3316681888}"/>
               </a:ext>
             </a:extLst>
           </p:cNvPr>
@@ -3916,8 +3993,8 @@
         </p:nvSpPr>
         <p:spPr>
           <a:xfrm>
-            <a:off x="10772372" y="4619981"/>
-            <a:ext cx="1185426" cy="646331"/>
+            <a:off x="9475384" y="5538149"/>
+            <a:ext cx="2664941" cy="1323439"/>
           </a:xfrm>
           <a:prstGeom prst="rect">
             <a:avLst/>
@@ -3931,104 +4008,51 @@
           <a:lstStyle/>
           <a:p>
             <a:r>
-              <a:rPr lang="en-US" dirty="0">
-                <a:solidFill>
-                  <a:srgbClr val="FF0000"/>
-                </a:solidFill>
-              </a:rPr>
-              <a:t>Vector of </a:t>
-            </a:r>
-          </a:p>
-          <a:p>
-            <a:r>
-              <a:rPr lang="en-US" dirty="0">
-                <a:solidFill>
-                  <a:srgbClr val="FF0000"/>
-                </a:solidFill>
-              </a:rPr>
-              <a:t>Averages</a:t>
-            </a:r>
-          </a:p>
-        </p:txBody>
-      </p:sp>
-      <p:sp>
-        <p:nvSpPr>
-          <p:cNvPr id="14" name="Right Arrow 13">
-            <a:extLst>
-              <a:ext uri="{FF2B5EF4-FFF2-40B4-BE49-F238E27FC236}">
-                <a16:creationId xmlns:a16="http://schemas.microsoft.com/office/drawing/2014/main" id="{EF1F2D82-D4C9-764F-8506-EBF8A0AD00DD}"/>
-              </a:ext>
-            </a:extLst>
-          </p:cNvPr>
-          <p:cNvSpPr/>
+              <a:rPr lang="en-US" sz="1600" dirty="0"/>
+              <a:t>Note how the correction is different for each sample vector "y", it depends on squared normalized length of this vector.</a:t>
+            </a:r>
+          </a:p>
+        </p:txBody>
+      </p:sp>
+      <p:cxnSp>
+        <p:nvCxnSpPr>
+          <p:cNvPr id="21" name="Straight Arrow Connector 20">
+            <a:extLst>
+              <a:ext uri="{FF2B5EF4-FFF2-40B4-BE49-F238E27FC236}">
+                <a16:creationId xmlns:a16="http://schemas.microsoft.com/office/drawing/2014/main" id="{962EA97A-16CF-A949-8207-4DCDA5ADB063}"/>
+              </a:ext>
+            </a:extLst>
+          </p:cNvPr>
+          <p:cNvCxnSpPr/>
           <p:nvPr/>
-        </p:nvSpPr>
-        <p:spPr>
-          <a:xfrm rot="11774949">
-            <a:off x="10121199" y="4698810"/>
-            <a:ext cx="600501" cy="259628"/>
-          </a:xfrm>
-          <a:prstGeom prst="rightArrow">
+        </p:nvCxnSpPr>
+        <p:spPr>
+          <a:xfrm flipH="1" flipV="1">
+            <a:off x="6635578" y="5758249"/>
+            <a:ext cx="2681417" cy="279927"/>
+          </a:xfrm>
+          <a:prstGeom prst="straightConnector1">
             <a:avLst/>
           </a:prstGeom>
+          <a:ln>
+            <a:tailEnd type="triangle"/>
+          </a:ln>
         </p:spPr>
         <p:style>
-          <a:lnRef idx="2">
-            <a:schemeClr val="accent1">
-              <a:shade val="50000"/>
-            </a:schemeClr>
+          <a:lnRef idx="1">
+            <a:schemeClr val="accent1"/>
           </a:lnRef>
-          <a:fillRef idx="1">
+          <a:fillRef idx="0">
             <a:schemeClr val="accent1"/>
           </a:fillRef>
           <a:effectRef idx="0">
             <a:schemeClr val="accent1"/>
           </a:effectRef>
           <a:fontRef idx="minor">
-            <a:schemeClr val="lt1"/>
+            <a:schemeClr val="tx1"/>
           </a:fontRef>
         </p:style>
-        <p:txBody>
-          <a:bodyPr rtlCol="0" anchor="ctr"/>
-          <a:lstStyle/>
-          <a:p>
-            <a:pPr algn="ctr"/>
-            <a:endParaRPr lang="en-US"/>
-          </a:p>
-        </p:txBody>
-      </p:sp>
-      <p:sp>
-        <p:nvSpPr>
-          <p:cNvPr id="15" name="TextBox 14">
-            <a:extLst>
-              <a:ext uri="{FF2B5EF4-FFF2-40B4-BE49-F238E27FC236}">
-                <a16:creationId xmlns:a16="http://schemas.microsoft.com/office/drawing/2014/main" id="{F09EC4C2-909F-A94E-848A-AEF917155027}"/>
-              </a:ext>
-            </a:extLst>
-          </p:cNvPr>
-          <p:cNvSpPr txBox="1"/>
-          <p:nvPr/>
-        </p:nvSpPr>
-        <p:spPr>
-          <a:xfrm>
-            <a:off x="-245660" y="5090615"/>
-            <a:ext cx="184731" cy="369332"/>
-          </a:xfrm>
-          <a:prstGeom prst="rect">
-            <a:avLst/>
-          </a:prstGeom>
-          <a:noFill/>
-        </p:spPr>
-        <p:txBody>
-          <a:bodyPr wrap="none" rtlCol="0">
-            <a:spAutoFit/>
-          </a:bodyPr>
-          <a:lstStyle/>
-          <a:p>
-            <a:endParaRPr lang="en-US"/>
-          </a:p>
-        </p:txBody>
-      </p:sp>
+      </p:cxnSp>
     </p:spTree>
     <p:extLst>
       <p:ext uri="{BB962C8B-B14F-4D97-AF65-F5344CB8AC3E}">
@@ -4061,10 +4085,10 @@
       </p:grpSpPr>
       <p:sp>
         <p:nvSpPr>
-          <p:cNvPr id="6" name="TextBox 5">
-            <a:extLst>
-              <a:ext uri="{FF2B5EF4-FFF2-40B4-BE49-F238E27FC236}">
-                <a16:creationId xmlns:a16="http://schemas.microsoft.com/office/drawing/2014/main" id="{B0F35CB5-A81F-104D-90BC-318D4759688D}"/>
+          <p:cNvPr id="4" name="TextBox 3">
+            <a:extLst>
+              <a:ext uri="{FF2B5EF4-FFF2-40B4-BE49-F238E27FC236}">
+                <a16:creationId xmlns:a16="http://schemas.microsoft.com/office/drawing/2014/main" id="{CBB8EA38-C551-4B4F-AFD1-EA78A757653A}"/>
               </a:ext>
             </a:extLst>
           </p:cNvPr>
@@ -4073,8 +4097,8 @@
         </p:nvSpPr>
         <p:spPr>
           <a:xfrm>
-            <a:off x="0" y="656768"/>
-            <a:ext cx="7433187" cy="2862322"/>
+            <a:off x="109181" y="109182"/>
+            <a:ext cx="9403308" cy="1384995"/>
           </a:xfrm>
           <a:prstGeom prst="rect">
             <a:avLst/>
@@ -4088,104 +4112,62 @@
           <a:lstStyle/>
           <a:p>
             <a:r>
-              <a:rPr lang="en-US" dirty="0"/>
-              <a:t>Why is the James-Stein estimator called a “shrinkage” estimator?</a:t>
-            </a:r>
-          </a:p>
-          <a:p>
-            <a:r>
-              <a:rPr lang="en-US" dirty="0"/>
-              <a:t> - </a:t>
-            </a:r>
-            <a:r>
-              <a:rPr lang="en-US" dirty="0">
+              <a:rPr lang="en-US" b="1" dirty="0"/>
+              <a:t>The 1988 </a:t>
+            </a:r>
+            <a:r>
+              <a:rPr lang="en-US" b="1" dirty="0" err="1"/>
+              <a:t>Neyman</a:t>
+            </a:r>
+            <a:r>
+              <a:rPr lang="en-US" b="1" dirty="0"/>
+              <a:t> Memorial Lecture: A Galtonian Perspective on Shrinkage Estimators</a:t>
+            </a:r>
+          </a:p>
+          <a:p>
+            <a:r>
+              <a:rPr lang="en-US" dirty="0"/>
+              <a:t>By Stephen M. Stigler</a:t>
+            </a:r>
+          </a:p>
+          <a:p>
+            <a:r>
+              <a:rPr lang="en-US" sz="1600" dirty="0">
                 <a:hlinkClick r:id="rId2"/>
               </a:rPr>
-              <a:t>https://en.wikipedia.org/wiki/James%E2%80%93Stein_estimator</a:t>
-            </a:r>
-            <a:r>
-              <a:rPr lang="en-US" dirty="0"/>
+              <a:t>https://projecteuclid.org/download/pdf_1/euclid.ss/1177012274</a:t>
+            </a:r>
+            <a:r>
+              <a:rPr lang="en-US" sz="1600" dirty="0"/>
               <a:t> </a:t>
             </a:r>
           </a:p>
           <a:p>
             <a:r>
-              <a:rPr lang="en-US" dirty="0"/>
-              <a:t> - </a:t>
-            </a:r>
-            <a:r>
-              <a:rPr lang="en-US" dirty="0">
+              <a:rPr lang="en-US" sz="1600" dirty="0"/>
+              <a:t>also these slides:</a:t>
+            </a:r>
+          </a:p>
+          <a:p>
+            <a:r>
+              <a:rPr lang="en-US" sz="1600" dirty="0">
                 <a:hlinkClick r:id="rId3"/>
               </a:rPr>
-              <a:t>https://stats.stackexchange.com/questions/304308/why-is-the-james-stein-estimator-called-a-shrinkage-estimator</a:t>
-            </a:r>
-            <a:endParaRPr lang="en-US" dirty="0"/>
-          </a:p>
-          <a:p>
-            <a:endParaRPr lang="en-US" dirty="0"/>
-          </a:p>
-          <a:p>
-            <a:r>
-              <a:rPr lang="en-US" dirty="0"/>
-              <a:t>Why isn't the James Stein estimator the standard method for linear regression if it is strictly better than OLS when there are more than 2 covariates?</a:t>
-            </a:r>
-          </a:p>
-          <a:p>
-            <a:r>
-              <a:rPr lang="en-US" dirty="0"/>
-              <a:t> - </a:t>
-            </a:r>
-            <a:r>
-              <a:rPr lang="en-US" dirty="0">
-                <a:hlinkClick r:id="rId4"/>
-              </a:rPr>
-              <a:t>https://www.quora.com/Why-isnt-the-James-Stein-estimator-the-standard-method-for-linear-regression-if-it-is-strictly-better-than-OLS-when-there-are-more-than-2-covariates</a:t>
-            </a:r>
-            <a:endParaRPr lang="en-US" dirty="0"/>
-          </a:p>
-        </p:txBody>
-      </p:sp>
-      <p:sp>
-        <p:nvSpPr>
-          <p:cNvPr id="7" name="TextBox 6">
-            <a:extLst>
-              <a:ext uri="{FF2B5EF4-FFF2-40B4-BE49-F238E27FC236}">
-                <a16:creationId xmlns:a16="http://schemas.microsoft.com/office/drawing/2014/main" id="{C905D215-2DF8-EC48-816F-5AB013F85FA5}"/>
-              </a:ext>
-            </a:extLst>
-          </p:cNvPr>
-          <p:cNvSpPr txBox="1"/>
-          <p:nvPr/>
-        </p:nvSpPr>
-        <p:spPr>
-          <a:xfrm>
-            <a:off x="0" y="60295"/>
-            <a:ext cx="6452419" cy="523220"/>
-          </a:xfrm>
-          <a:prstGeom prst="rect">
-            <a:avLst/>
-          </a:prstGeom>
-          <a:noFill/>
-        </p:spPr>
-        <p:txBody>
-          <a:bodyPr wrap="square" rtlCol="0">
-            <a:spAutoFit/>
-          </a:bodyPr>
-          <a:lstStyle/>
-          <a:p>
-            <a:r>
-              <a:rPr lang="en-US" sz="2800" b="1" dirty="0"/>
-              <a:t>James-Stein Estimator - continued</a:t>
+              <a:t>https://maxkasy.github.io/home/files/teaching/TopicsEconometrics2019/NormalShrinkage-Slides.pdf</a:t>
+            </a:r>
+            <a:r>
+              <a:rPr lang="en-US" sz="1600" dirty="0"/>
+              <a:t>  </a:t>
             </a:r>
           </a:p>
         </p:txBody>
       </p:sp>
       <p:pic>
         <p:nvPicPr>
-          <p:cNvPr id="2" name="Picture 1">
-            <a:extLst>
-              <a:ext uri="{FF2B5EF4-FFF2-40B4-BE49-F238E27FC236}">
-                <a16:creationId xmlns:a16="http://schemas.microsoft.com/office/drawing/2014/main" id="{238B8DC1-11D8-6B42-8B2E-D5D6EC1BA5D6}"/>
+          <p:cNvPr id="5" name="Picture 4">
+            <a:extLst>
+              <a:ext uri="{FF2B5EF4-FFF2-40B4-BE49-F238E27FC236}">
+                <a16:creationId xmlns:a16="http://schemas.microsoft.com/office/drawing/2014/main" id="{EDE7DE24-74B4-D043-AA8B-839FCB262D63}"/>
               </a:ext>
             </a:extLst>
           </p:cNvPr>
@@ -4195,7 +4177,7 @@
           <p:nvPr/>
         </p:nvPicPr>
         <p:blipFill>
-          <a:blip r:embed="rId5" cstate="email">
+          <a:blip r:embed="rId4" cstate="email">
             <a:extLst>
               <a:ext uri="{28A0092B-C50C-407E-A947-70E740481C1C}">
                 <a14:useLocalDpi xmlns:a14="http://schemas.microsoft.com/office/drawing/2010/main"/>
@@ -4208,8 +4190,8 @@
         </p:blipFill>
         <p:spPr>
           <a:xfrm>
-            <a:off x="7569200" y="0"/>
-            <a:ext cx="4622800" cy="3670300"/>
+            <a:off x="7049133" y="1919099"/>
+            <a:ext cx="5142867" cy="4938901"/>
           </a:xfrm>
           <a:prstGeom prst="rect">
             <a:avLst/>
@@ -4218,10 +4200,10 @@
       </p:pic>
       <p:sp>
         <p:nvSpPr>
-          <p:cNvPr id="9" name="TextBox 8">
-            <a:extLst>
-              <a:ext uri="{FF2B5EF4-FFF2-40B4-BE49-F238E27FC236}">
-                <a16:creationId xmlns:a16="http://schemas.microsoft.com/office/drawing/2014/main" id="{8900125B-CDE3-1E48-A686-117C8983E172}"/>
+          <p:cNvPr id="6" name="TextBox 5">
+            <a:extLst>
+              <a:ext uri="{FF2B5EF4-FFF2-40B4-BE49-F238E27FC236}">
+                <a16:creationId xmlns:a16="http://schemas.microsoft.com/office/drawing/2014/main" id="{EA5642CA-F80C-CD41-8133-D117A4B3CB61}"/>
               </a:ext>
             </a:extLst>
           </p:cNvPr>
@@ -4230,8 +4212,8 @@
         </p:nvSpPr>
         <p:spPr>
           <a:xfrm>
-            <a:off x="110611" y="3743553"/>
-            <a:ext cx="11850331" cy="2031325"/>
+            <a:off x="-1" y="1670505"/>
+            <a:ext cx="7165075" cy="4062651"/>
           </a:xfrm>
           <a:prstGeom prst="rect">
             <a:avLst/>
@@ -4246,51 +4228,255 @@
           <a:p>
             <a:r>
               <a:rPr lang="en-US" dirty="0"/>
-              <a:t>Stein's Paradox in Statistics – by Bradley </a:t>
+              <a:t>For each </a:t>
             </a:r>
             <a:r>
               <a:rPr lang="en-US" dirty="0" err="1"/>
-              <a:t>Efron</a:t>
-            </a:r>
-            <a:r>
-              <a:rPr lang="en-US" dirty="0"/>
-              <a:t> and Carl Morris (Scientific American, 1977)</a:t>
-            </a:r>
-          </a:p>
-          <a:p>
-            <a:r>
-              <a:rPr lang="en-US" dirty="0"/>
-              <a:t> - </a:t>
-            </a:r>
-            <a:r>
-              <a:rPr lang="en-US" dirty="0">
-                <a:hlinkClick r:id="rId6"/>
+              <a:t>i</a:t>
+            </a:r>
+            <a:r>
+              <a:rPr lang="en-US" dirty="0"/>
+              <a:t> in [1,..k], X</a:t>
+            </a:r>
+            <a:r>
+              <a:rPr lang="en-US" baseline="-25000" dirty="0"/>
+              <a:t>i</a:t>
+            </a:r>
+            <a:r>
+              <a:rPr lang="en-US" dirty="0"/>
+              <a:t> is normally distributed with mean </a:t>
+            </a:r>
+            <a:r>
+              <a:rPr lang="el-GR" dirty="0"/>
+              <a:t>θ</a:t>
+            </a:r>
+            <a:r>
+              <a:rPr lang="en-US" baseline="-25000" dirty="0" err="1"/>
+              <a:t>i</a:t>
+            </a:r>
+            <a:r>
+              <a:rPr lang="en-US" baseline="-25000" dirty="0"/>
+              <a:t> </a:t>
+            </a:r>
+            <a:r>
+              <a:rPr lang="en-US" dirty="0"/>
+              <a:t> . We want to find estimate for each </a:t>
+            </a:r>
+            <a:r>
+              <a:rPr lang="el-GR" dirty="0"/>
+              <a:t>θ</a:t>
+            </a:r>
+            <a:r>
+              <a:rPr lang="en-US" baseline="-25000" dirty="0" err="1"/>
+              <a:t>i</a:t>
+            </a:r>
+            <a:r>
+              <a:rPr lang="en-US" dirty="0"/>
+              <a:t> to minimize the sum of MSE. This is equivalent to standard linear regression with k-points (X</a:t>
+            </a:r>
+            <a:r>
+              <a:rPr lang="en-US" baseline="-25000" dirty="0"/>
+              <a:t>i</a:t>
+            </a:r>
+            <a:r>
+              <a:rPr lang="en-US" dirty="0"/>
+              <a:t> ,</a:t>
+            </a:r>
+            <a:r>
+              <a:rPr lang="el-GR" dirty="0"/>
+              <a:t> θ</a:t>
+            </a:r>
+            <a:r>
+              <a:rPr lang="en-US" baseline="-25000" dirty="0" err="1"/>
+              <a:t>i</a:t>
+            </a:r>
+            <a:r>
+              <a:rPr lang="en-US" dirty="0"/>
+              <a:t>) – see the graph.</a:t>
+            </a:r>
+          </a:p>
+          <a:p>
+            <a:endParaRPr lang="en-US" sz="800" dirty="0"/>
+          </a:p>
+          <a:p>
+            <a:r>
+              <a:rPr lang="en-US" b="1" dirty="0">
+                <a:solidFill>
+                  <a:srgbClr val="00B050"/>
+                </a:solidFill>
               </a:rPr>
-              <a:t>http://statweb.stanford.edu/~ckirby/brad/other/Article1977.pdf</a:t>
-            </a:r>
-            <a:r>
-              <a:rPr lang="en-US" dirty="0"/>
-              <a:t> </a:t>
-            </a:r>
-          </a:p>
-          <a:p>
-            <a:r>
-              <a:rPr lang="en-US" dirty="0"/>
-              <a:t>In this "Scientific American" article, </a:t>
+              <a:t>For number of dimensions k = 2 there are only two points, so you can draw only one line. </a:t>
+            </a:r>
+          </a:p>
+          <a:p>
+            <a:endParaRPr lang="en-US" sz="800" dirty="0"/>
+          </a:p>
+          <a:p>
+            <a:r>
+              <a:rPr lang="en-US" b="1" dirty="0">
+                <a:solidFill>
+                  <a:srgbClr val="FF0000"/>
+                </a:solidFill>
+              </a:rPr>
+              <a:t>But for k &gt;= 3 ,  E(X|</a:t>
+            </a:r>
+            <a:r>
+              <a:rPr lang="el-GR" b="1" dirty="0">
+                <a:solidFill>
+                  <a:srgbClr val="FF0000"/>
+                </a:solidFill>
+              </a:rPr>
+              <a:t>θ</a:t>
+            </a:r>
+            <a:r>
+              <a:rPr lang="en-US" b="1" dirty="0">
+                <a:solidFill>
+                  <a:srgbClr val="FF0000"/>
+                </a:solidFill>
+              </a:rPr>
+              <a:t>) is generally not same as E(</a:t>
+            </a:r>
+            <a:r>
+              <a:rPr lang="el-GR" b="1" dirty="0">
+                <a:solidFill>
+                  <a:srgbClr val="FF0000"/>
+                </a:solidFill>
+              </a:rPr>
+              <a:t>θ</a:t>
+            </a:r>
+            <a:r>
+              <a:rPr lang="en-US" b="1" dirty="0">
+                <a:solidFill>
+                  <a:srgbClr val="FF0000"/>
+                </a:solidFill>
+              </a:rPr>
+              <a:t>|X) .</a:t>
+            </a:r>
+          </a:p>
+          <a:p>
+            <a:endParaRPr lang="en-US" sz="800" dirty="0"/>
+          </a:p>
+          <a:p>
+            <a:r>
+              <a:rPr lang="en-US" dirty="0"/>
+              <a:t>X is distributed normally with mean </a:t>
+            </a:r>
+            <a:r>
+              <a:rPr lang="el-GR" dirty="0"/>
+              <a:t>θ</a:t>
+            </a:r>
+            <a:r>
+              <a:rPr lang="en-US" dirty="0"/>
+              <a:t>, so E(X</a:t>
+            </a:r>
+            <a:r>
+              <a:rPr lang="en-US" baseline="-25000" dirty="0"/>
+              <a:t>i</a:t>
+            </a:r>
+            <a:r>
+              <a:rPr lang="en-US" dirty="0"/>
+              <a:t>|</a:t>
+            </a:r>
+            <a:r>
+              <a:rPr lang="el-GR" dirty="0"/>
+              <a:t>θ</a:t>
+            </a:r>
+            <a:r>
+              <a:rPr lang="en-US" baseline="-25000" dirty="0" err="1"/>
+              <a:t>i</a:t>
+            </a:r>
+            <a:r>
+              <a:rPr lang="en-US" dirty="0"/>
+              <a:t>) = </a:t>
+            </a:r>
+            <a:r>
+              <a:rPr lang="el-GR" dirty="0"/>
+              <a:t>θ</a:t>
+            </a:r>
+            <a:r>
+              <a:rPr lang="en-US" baseline="-25000" dirty="0" err="1"/>
+              <a:t>i</a:t>
+            </a:r>
+            <a:endParaRPr lang="en-US" dirty="0"/>
+          </a:p>
+          <a:p>
+            <a:r>
+              <a:rPr lang="en-US" dirty="0"/>
+              <a:t>So If we estimate X from </a:t>
+            </a:r>
+            <a:r>
+              <a:rPr lang="el-GR" dirty="0"/>
+              <a:t>θ</a:t>
+            </a:r>
+            <a:r>
+              <a:rPr lang="en-US" dirty="0"/>
+              <a:t> , we simply follow line </a:t>
+            </a:r>
+            <a:r>
+              <a:rPr lang="el-GR" dirty="0"/>
+              <a:t>θ</a:t>
+            </a:r>
+            <a:r>
+              <a:rPr lang="en-US" dirty="0"/>
+              <a:t> = X.</a:t>
+            </a:r>
+          </a:p>
+          <a:p>
+            <a:endParaRPr lang="en-US" dirty="0"/>
+          </a:p>
+          <a:p>
+            <a:r>
+              <a:rPr lang="en-US" dirty="0"/>
+              <a:t>But if we estimate </a:t>
+            </a:r>
+            <a:r>
+              <a:rPr lang="el-GR" dirty="0"/>
+              <a:t>θ</a:t>
+            </a:r>
+            <a:r>
+              <a:rPr lang="en-US" dirty="0"/>
+              <a:t> from X - then we will generally get different estimate of </a:t>
+            </a:r>
+            <a:r>
+              <a:rPr lang="el-GR" dirty="0"/>
+              <a:t>θ</a:t>
+            </a:r>
+            <a:r>
+              <a:rPr lang="en-US" dirty="0"/>
+              <a:t>. JS estimator shrinkage is derived by finding estimators of the form </a:t>
+            </a:r>
+          </a:p>
+          <a:p>
+            <a:r>
+              <a:rPr lang="en-US" dirty="0"/>
+              <a:t>    </a:t>
+            </a:r>
+            <a:r>
+              <a:rPr lang="el-GR" dirty="0"/>
+              <a:t>θ</a:t>
+            </a:r>
+            <a:r>
+              <a:rPr lang="en-US" baseline="-25000" dirty="0" err="1"/>
+              <a:t>i</a:t>
+            </a:r>
+            <a:r>
+              <a:rPr lang="en-US" dirty="0"/>
+              <a:t> = </a:t>
             </a:r>
             <a:r>
               <a:rPr lang="en-US" dirty="0" err="1"/>
-              <a:t>Efron</a:t>
-            </a:r>
-            <a:r>
-              <a:rPr lang="en-US" dirty="0"/>
-              <a:t> explained the paradox with a baseball example: while most people would think the best prediction for the end-of-season batting averages of 10 players would be obtained by looking at each player's early average, the James-Stein theorem showed that including other players' averages leads to a better result. This is a paradox because players' individual performances shouldn't influence each other. </a:t>
-            </a:r>
-          </a:p>
-          <a:p>
-            <a:r>
-              <a:rPr lang="en-US" dirty="0"/>
-              <a:t>The picture above shows the shrinking of individual batting averages toward the overall "average of averages" by ~80% .</a:t>
+              <a:t>a+b·X</a:t>
+            </a:r>
+            <a:r>
+              <a:rPr lang="en-US" baseline="-25000" dirty="0" err="1"/>
+              <a:t>i</a:t>
+            </a:r>
+            <a:endParaRPr lang="en-US" baseline="-25000" dirty="0"/>
+          </a:p>
+          <a:p>
+            <a:r>
+              <a:rPr lang="en-US" dirty="0"/>
+              <a:t>and finding values of a and b that minimize loss.</a:t>
             </a:r>
           </a:p>
         </p:txBody>
@@ -4298,7 +4484,7 @@
     </p:spTree>
     <p:extLst>
       <p:ext uri="{BB962C8B-B14F-4D97-AF65-F5344CB8AC3E}">
-        <p14:creationId xmlns:p14="http://schemas.microsoft.com/office/powerpoint/2010/main" val="3468902571"/>
+        <p14:creationId xmlns:p14="http://schemas.microsoft.com/office/powerpoint/2010/main" val="3146839931"/>
       </p:ext>
     </p:extLst>
   </p:cSld>
@@ -4538,7 +4724,7 @@
         </p:blipFill>
         <p:spPr>
           <a:xfrm>
-            <a:off x="992239" y="1793945"/>
+            <a:off x="353962" y="1905013"/>
             <a:ext cx="5969000" cy="3061244"/>
           </a:xfrm>
           <a:prstGeom prst="rect">
@@ -4627,12 +4813,59 @@
           </a:p>
         </p:txBody>
       </p:sp>
+      <p:sp>
+        <p:nvSpPr>
+          <p:cNvPr id="2" name="TextBox 1">
+            <a:extLst>
+              <a:ext uri="{FF2B5EF4-FFF2-40B4-BE49-F238E27FC236}">
+                <a16:creationId xmlns:a16="http://schemas.microsoft.com/office/drawing/2014/main" id="{C45C4170-B6A2-E545-8F93-71389923E8E3}"/>
+              </a:ext>
+            </a:extLst>
+          </p:cNvPr>
+          <p:cNvSpPr txBox="1"/>
+          <p:nvPr/>
+        </p:nvSpPr>
+        <p:spPr>
+          <a:xfrm>
+            <a:off x="6542754" y="4966257"/>
+            <a:ext cx="5201182" cy="1477328"/>
+          </a:xfrm>
+          <a:prstGeom prst="rect">
+            <a:avLst/>
+          </a:prstGeom>
+          <a:noFill/>
+        </p:spPr>
+        <p:txBody>
+          <a:bodyPr wrap="square" rtlCol="0">
+            <a:spAutoFit/>
+          </a:bodyPr>
+          <a:lstStyle/>
+          <a:p>
+            <a:r>
+              <a:rPr lang="en-US" dirty="0"/>
+              <a:t>Here:</a:t>
+            </a:r>
+          </a:p>
+          <a:p>
+            <a:r>
+              <a:rPr lang="en-US" dirty="0"/>
+              <a:t>"y" – sample vector with "m" components</a:t>
+            </a:r>
+          </a:p>
+          <a:p>
+            <a:r>
+              <a:rPr lang="en-US" dirty="0"/>
+              <a:t>Note how the correction is different for each sample vector "y", it depends on squared normalized length of this vector.</a:t>
+            </a:r>
+          </a:p>
+        </p:txBody>
+      </p:sp>
       <p:pic>
         <p:nvPicPr>
-          <p:cNvPr id="12" name="Picture 11">
-            <a:extLst>
-              <a:ext uri="{FF2B5EF4-FFF2-40B4-BE49-F238E27FC236}">
-                <a16:creationId xmlns:a16="http://schemas.microsoft.com/office/drawing/2014/main" id="{5D6584B0-4935-D848-B23F-0761F70780C6}"/>
+          <p:cNvPr id="13" name="Picture 12">
+            <a:extLst>
+              <a:ext uri="{FF2B5EF4-FFF2-40B4-BE49-F238E27FC236}">
+                <a16:creationId xmlns:a16="http://schemas.microsoft.com/office/drawing/2014/main" id="{6A9ED865-3E21-A542-8CE2-361ED3C95919}"/>
               </a:ext>
             </a:extLst>
           </p:cNvPr>
@@ -4642,21 +4875,15 @@
           <p:nvPr/>
         </p:nvPicPr>
         <p:blipFill>
-          <a:blip r:embed="rId9" cstate="email">
-            <a:extLst>
-              <a:ext uri="{28A0092B-C50C-407E-A947-70E740481C1C}">
-                <a14:useLocalDpi xmlns:a14="http://schemas.microsoft.com/office/drawing/2010/main"/>
-              </a:ext>
-            </a:extLst>
-          </a:blip>
+          <a:blip r:embed="rId9"/>
           <a:stretch>
             <a:fillRect/>
           </a:stretch>
         </p:blipFill>
         <p:spPr>
           <a:xfrm>
-            <a:off x="1916806" y="5366415"/>
-            <a:ext cx="4826000" cy="1155700"/>
+            <a:off x="1466716" y="5109498"/>
+            <a:ext cx="4025900" cy="1346200"/>
           </a:xfrm>
           <a:prstGeom prst="rect">
             <a:avLst/>
@@ -4695,10 +4922,10 @@
       </p:grpSpPr>
       <p:sp>
         <p:nvSpPr>
-          <p:cNvPr id="4" name="TextBox 3">
-            <a:extLst>
-              <a:ext uri="{FF2B5EF4-FFF2-40B4-BE49-F238E27FC236}">
-                <a16:creationId xmlns:a16="http://schemas.microsoft.com/office/drawing/2014/main" id="{CBB8EA38-C551-4B4F-AFD1-EA78A757653A}"/>
+          <p:cNvPr id="6" name="TextBox 5">
+            <a:extLst>
+              <a:ext uri="{FF2B5EF4-FFF2-40B4-BE49-F238E27FC236}">
+                <a16:creationId xmlns:a16="http://schemas.microsoft.com/office/drawing/2014/main" id="{B0F35CB5-A81F-104D-90BC-318D4759688D}"/>
               </a:ext>
             </a:extLst>
           </p:cNvPr>
@@ -4707,8 +4934,8 @@
         </p:nvSpPr>
         <p:spPr>
           <a:xfrm>
-            <a:off x="109181" y="109182"/>
-            <a:ext cx="9403308" cy="1384995"/>
+            <a:off x="0" y="656768"/>
+            <a:ext cx="7433187" cy="2862322"/>
           </a:xfrm>
           <a:prstGeom prst="rect">
             <a:avLst/>
@@ -4722,62 +4949,104 @@
           <a:lstStyle/>
           <a:p>
             <a:r>
-              <a:rPr lang="en-US" b="1" dirty="0"/>
-              <a:t>The 1988 </a:t>
-            </a:r>
-            <a:r>
-              <a:rPr lang="en-US" b="1" dirty="0" err="1"/>
-              <a:t>Neyman</a:t>
-            </a:r>
-            <a:r>
-              <a:rPr lang="en-US" b="1" dirty="0"/>
-              <a:t> Memorial Lecture: A Galtonian Perspective on Shrinkage Estimators</a:t>
-            </a:r>
-          </a:p>
-          <a:p>
-            <a:r>
-              <a:rPr lang="en-US" dirty="0"/>
-              <a:t>By Stephen M. Stigler</a:t>
-            </a:r>
-          </a:p>
-          <a:p>
-            <a:r>
-              <a:rPr lang="en-US" sz="1600" dirty="0">
+              <a:rPr lang="en-US" dirty="0"/>
+              <a:t>Why is the James-Stein estimator called a “shrinkage” estimator?</a:t>
+            </a:r>
+          </a:p>
+          <a:p>
+            <a:r>
+              <a:rPr lang="en-US" dirty="0"/>
+              <a:t> - </a:t>
+            </a:r>
+            <a:r>
+              <a:rPr lang="en-US" dirty="0">
                 <a:hlinkClick r:id="rId2"/>
               </a:rPr>
-              <a:t>https://projecteuclid.org/download/pdf_1/euclid.ss/1177012274</a:t>
-            </a:r>
-            <a:r>
-              <a:rPr lang="en-US" sz="1600" dirty="0"/>
-              <a:t> gg</a:t>
-            </a:r>
-          </a:p>
-          <a:p>
-            <a:r>
-              <a:rPr lang="en-US" sz="1600" dirty="0"/>
-              <a:t>also these slides:</a:t>
-            </a:r>
-          </a:p>
-          <a:p>
-            <a:r>
-              <a:rPr lang="en-US" sz="1600" dirty="0">
+              <a:t>https://en.wikipedia.org/wiki/James%E2%80%93Stein_estimator</a:t>
+            </a:r>
+            <a:r>
+              <a:rPr lang="en-US" dirty="0"/>
+              <a:t> </a:t>
+            </a:r>
+          </a:p>
+          <a:p>
+            <a:r>
+              <a:rPr lang="en-US" dirty="0"/>
+              <a:t> - </a:t>
+            </a:r>
+            <a:r>
+              <a:rPr lang="en-US" dirty="0">
                 <a:hlinkClick r:id="rId3"/>
               </a:rPr>
-              <a:t>https://maxkasy.github.io/home/files/teaching/TopicsEconometrics2019/NormalShrinkage-Slides.pdf</a:t>
-            </a:r>
-            <a:r>
-              <a:rPr lang="en-US" sz="1600" dirty="0"/>
-              <a:t>  </a:t>
+              <a:t>https://stats.stackexchange.com/questions/304308/why-is-the-james-stein-estimator-called-a-shrinkage-estimator</a:t>
+            </a:r>
+            <a:endParaRPr lang="en-US" dirty="0"/>
+          </a:p>
+          <a:p>
+            <a:endParaRPr lang="en-US" dirty="0"/>
+          </a:p>
+          <a:p>
+            <a:r>
+              <a:rPr lang="en-US" dirty="0"/>
+              <a:t>Why isn't the James Stein estimator the standard method for linear regression if it is strictly better than OLS when there are more than 2 covariates?</a:t>
+            </a:r>
+          </a:p>
+          <a:p>
+            <a:r>
+              <a:rPr lang="en-US" dirty="0"/>
+              <a:t> - </a:t>
+            </a:r>
+            <a:r>
+              <a:rPr lang="en-US" dirty="0">
+                <a:hlinkClick r:id="rId4"/>
+              </a:rPr>
+              <a:t>https://www.quora.com/Why-isnt-the-James-Stein-estimator-the-standard-method-for-linear-regression-if-it-is-strictly-better-than-OLS-when-there-are-more-than-2-covariates</a:t>
+            </a:r>
+            <a:endParaRPr lang="en-US" dirty="0"/>
+          </a:p>
+        </p:txBody>
+      </p:sp>
+      <p:sp>
+        <p:nvSpPr>
+          <p:cNvPr id="7" name="TextBox 6">
+            <a:extLst>
+              <a:ext uri="{FF2B5EF4-FFF2-40B4-BE49-F238E27FC236}">
+                <a16:creationId xmlns:a16="http://schemas.microsoft.com/office/drawing/2014/main" id="{C905D215-2DF8-EC48-816F-5AB013F85FA5}"/>
+              </a:ext>
+            </a:extLst>
+          </p:cNvPr>
+          <p:cNvSpPr txBox="1"/>
+          <p:nvPr/>
+        </p:nvSpPr>
+        <p:spPr>
+          <a:xfrm>
+            <a:off x="0" y="60295"/>
+            <a:ext cx="6452419" cy="523220"/>
+          </a:xfrm>
+          <a:prstGeom prst="rect">
+            <a:avLst/>
+          </a:prstGeom>
+          <a:noFill/>
+        </p:spPr>
+        <p:txBody>
+          <a:bodyPr wrap="square" rtlCol="0">
+            <a:spAutoFit/>
+          </a:bodyPr>
+          <a:lstStyle/>
+          <a:p>
+            <a:r>
+              <a:rPr lang="en-US" sz="2800" b="1" dirty="0"/>
+              <a:t>James-Stein Estimator - continued</a:t>
             </a:r>
           </a:p>
         </p:txBody>
       </p:sp>
       <p:pic>
         <p:nvPicPr>
-          <p:cNvPr id="5" name="Picture 4">
-            <a:extLst>
-              <a:ext uri="{FF2B5EF4-FFF2-40B4-BE49-F238E27FC236}">
-                <a16:creationId xmlns:a16="http://schemas.microsoft.com/office/drawing/2014/main" id="{EDE7DE24-74B4-D043-AA8B-839FCB262D63}"/>
+          <p:cNvPr id="2" name="Picture 1">
+            <a:extLst>
+              <a:ext uri="{FF2B5EF4-FFF2-40B4-BE49-F238E27FC236}">
+                <a16:creationId xmlns:a16="http://schemas.microsoft.com/office/drawing/2014/main" id="{238B8DC1-11D8-6B42-8B2E-D5D6EC1BA5D6}"/>
               </a:ext>
             </a:extLst>
           </p:cNvPr>
@@ -4787,7 +5056,7 @@
           <p:nvPr/>
         </p:nvPicPr>
         <p:blipFill>
-          <a:blip r:embed="rId4" cstate="email">
+          <a:blip r:embed="rId5" cstate="email">
             <a:extLst>
               <a:ext uri="{28A0092B-C50C-407E-A947-70E740481C1C}">
                 <a14:useLocalDpi xmlns:a14="http://schemas.microsoft.com/office/drawing/2010/main"/>
@@ -4800,8 +5069,8 @@
         </p:blipFill>
         <p:spPr>
           <a:xfrm>
-            <a:off x="7049133" y="1919099"/>
-            <a:ext cx="5142867" cy="4938901"/>
+            <a:off x="7569200" y="0"/>
+            <a:ext cx="4622800" cy="3670300"/>
           </a:xfrm>
           <a:prstGeom prst="rect">
             <a:avLst/>
@@ -4810,10 +5079,10 @@
       </p:pic>
       <p:sp>
         <p:nvSpPr>
-          <p:cNvPr id="6" name="TextBox 5">
-            <a:extLst>
-              <a:ext uri="{FF2B5EF4-FFF2-40B4-BE49-F238E27FC236}">
-                <a16:creationId xmlns:a16="http://schemas.microsoft.com/office/drawing/2014/main" id="{EA5642CA-F80C-CD41-8133-D117A4B3CB61}"/>
+          <p:cNvPr id="9" name="TextBox 8">
+            <a:extLst>
+              <a:ext uri="{FF2B5EF4-FFF2-40B4-BE49-F238E27FC236}">
+                <a16:creationId xmlns:a16="http://schemas.microsoft.com/office/drawing/2014/main" id="{8900125B-CDE3-1E48-A686-117C8983E172}"/>
               </a:ext>
             </a:extLst>
           </p:cNvPr>
@@ -4822,8 +5091,8 @@
         </p:nvSpPr>
         <p:spPr>
           <a:xfrm>
-            <a:off x="-1" y="1670505"/>
-            <a:ext cx="7165075" cy="4062651"/>
+            <a:off x="124739" y="4935877"/>
+            <a:ext cx="11850331" cy="1754326"/>
           </a:xfrm>
           <a:prstGeom prst="rect">
             <a:avLst/>
@@ -4838,251 +5107,80 @@
           <a:p>
             <a:r>
               <a:rPr lang="en-US" dirty="0"/>
-              <a:t>For each </a:t>
+              <a:t>Stein's Paradox in Statistics – by Bradley </a:t>
             </a:r>
             <a:r>
               <a:rPr lang="en-US" dirty="0" err="1"/>
-              <a:t>i</a:t>
-            </a:r>
-            <a:r>
-              <a:rPr lang="en-US" dirty="0"/>
-              <a:t> in [1,..k], X</a:t>
-            </a:r>
-            <a:r>
-              <a:rPr lang="en-US" baseline="-25000" dirty="0"/>
-              <a:t>i</a:t>
-            </a:r>
-            <a:r>
-              <a:rPr lang="en-US" dirty="0"/>
-              <a:t> is normally distributed with mean </a:t>
-            </a:r>
-            <a:r>
-              <a:rPr lang="el-GR" dirty="0"/>
-              <a:t>θ</a:t>
-            </a:r>
-            <a:r>
-              <a:rPr lang="en-US" baseline="-25000" dirty="0" err="1"/>
-              <a:t>i</a:t>
-            </a:r>
-            <a:r>
-              <a:rPr lang="en-US" baseline="-25000" dirty="0"/>
+              <a:t>Efron</a:t>
+            </a:r>
+            <a:r>
+              <a:rPr lang="en-US" dirty="0"/>
+              <a:t> and Carl Morris (Scientific American, 1977)</a:t>
+            </a:r>
+          </a:p>
+          <a:p>
+            <a:r>
+              <a:rPr lang="en-US" dirty="0"/>
+              <a:t> - </a:t>
+            </a:r>
+            <a:r>
+              <a:rPr lang="en-US" dirty="0">
+                <a:hlinkClick r:id="rId6"/>
+              </a:rPr>
+              <a:t>http://statweb.stanford.edu/~ckirby/brad/other/Article1977.pdf</a:t>
+            </a:r>
+            <a:r>
+              <a:rPr lang="en-US" dirty="0"/>
               <a:t> </a:t>
             </a:r>
-            <a:r>
-              <a:rPr lang="en-US" dirty="0"/>
-              <a:t> . We want to find estimate for each </a:t>
-            </a:r>
-            <a:r>
-              <a:rPr lang="el-GR" dirty="0"/>
-              <a:t>θ</a:t>
-            </a:r>
-            <a:r>
-              <a:rPr lang="en-US" baseline="-25000" dirty="0" err="1"/>
-              <a:t>i</a:t>
-            </a:r>
-            <a:r>
-              <a:rPr lang="en-US" dirty="0"/>
-              <a:t> to minimize the sum of MSE. This is equivalent to standard linear regression with k-points (X</a:t>
-            </a:r>
-            <a:r>
-              <a:rPr lang="en-US" baseline="-25000" dirty="0"/>
-              <a:t>i</a:t>
-            </a:r>
-            <a:r>
-              <a:rPr lang="en-US" dirty="0"/>
-              <a:t> ,</a:t>
-            </a:r>
-            <a:r>
-              <a:rPr lang="el-GR" dirty="0"/>
-              <a:t> θ</a:t>
-            </a:r>
-            <a:r>
-              <a:rPr lang="en-US" baseline="-25000" dirty="0" err="1"/>
-              <a:t>i</a:t>
-            </a:r>
-            <a:r>
-              <a:rPr lang="en-US" dirty="0"/>
-              <a:t>) – see the graph.</a:t>
-            </a:r>
-          </a:p>
-          <a:p>
-            <a:endParaRPr lang="en-US" sz="800" dirty="0"/>
-          </a:p>
-          <a:p>
-            <a:r>
-              <a:rPr lang="en-US" dirty="0"/>
-              <a:t>For number of dimensions k = 2 there are only two points, so you can draw only one line. </a:t>
-            </a:r>
-          </a:p>
-          <a:p>
-            <a:endParaRPr lang="en-US" sz="800" dirty="0"/>
-          </a:p>
-          <a:p>
-            <a:r>
-              <a:rPr lang="en-US" b="1" dirty="0">
-                <a:solidFill>
-                  <a:srgbClr val="FF0000"/>
-                </a:solidFill>
-              </a:rPr>
-              <a:t>But for k &gt;= 3 ,  E(X|</a:t>
-            </a:r>
-            <a:r>
-              <a:rPr lang="el-GR" b="1" dirty="0">
-                <a:solidFill>
-                  <a:srgbClr val="FF0000"/>
-                </a:solidFill>
-              </a:rPr>
-              <a:t>θ</a:t>
-            </a:r>
-            <a:r>
-              <a:rPr lang="en-US" b="1" dirty="0">
-                <a:solidFill>
-                  <a:srgbClr val="FF0000"/>
-                </a:solidFill>
-              </a:rPr>
-              <a:t>) is generally not same as E(</a:t>
-            </a:r>
-            <a:r>
-              <a:rPr lang="el-GR" b="1" dirty="0">
-                <a:solidFill>
-                  <a:srgbClr val="FF0000"/>
-                </a:solidFill>
-              </a:rPr>
-              <a:t>θ</a:t>
-            </a:r>
-            <a:r>
-              <a:rPr lang="en-US" b="1" dirty="0">
-                <a:solidFill>
-                  <a:srgbClr val="FF0000"/>
-                </a:solidFill>
-              </a:rPr>
-              <a:t>|X) .</a:t>
-            </a:r>
-          </a:p>
-          <a:p>
-            <a:endParaRPr lang="en-US" sz="800" dirty="0"/>
-          </a:p>
-          <a:p>
-            <a:r>
-              <a:rPr lang="en-US" dirty="0"/>
-              <a:t>X is distributed normally with mean </a:t>
-            </a:r>
-            <a:r>
-              <a:rPr lang="el-GR" dirty="0"/>
-              <a:t>θ</a:t>
-            </a:r>
-            <a:r>
-              <a:rPr lang="en-US" dirty="0"/>
-              <a:t>, so E(X</a:t>
-            </a:r>
-            <a:r>
-              <a:rPr lang="en-US" baseline="-25000" dirty="0"/>
-              <a:t>i</a:t>
-            </a:r>
-            <a:r>
-              <a:rPr lang="en-US" dirty="0"/>
-              <a:t>|</a:t>
-            </a:r>
-            <a:r>
-              <a:rPr lang="el-GR" dirty="0"/>
-              <a:t>θ</a:t>
-            </a:r>
-            <a:r>
-              <a:rPr lang="en-US" baseline="-25000" dirty="0" err="1"/>
-              <a:t>i</a:t>
-            </a:r>
-            <a:r>
-              <a:rPr lang="en-US" dirty="0"/>
-              <a:t>) = </a:t>
-            </a:r>
-            <a:r>
-              <a:rPr lang="el-GR" dirty="0"/>
-              <a:t>θ</a:t>
-            </a:r>
-            <a:r>
-              <a:rPr lang="en-US" baseline="-25000" dirty="0" err="1"/>
-              <a:t>i</a:t>
-            </a:r>
-            <a:endParaRPr lang="en-US" dirty="0"/>
-          </a:p>
-          <a:p>
-            <a:r>
-              <a:rPr lang="en-US" dirty="0"/>
-              <a:t>So If we estimate X from </a:t>
-            </a:r>
-            <a:r>
-              <a:rPr lang="el-GR" dirty="0"/>
-              <a:t>θ</a:t>
-            </a:r>
-            <a:r>
-              <a:rPr lang="en-US" dirty="0"/>
-              <a:t> , we simply follow line </a:t>
-            </a:r>
-            <a:r>
-              <a:rPr lang="el-GR" dirty="0"/>
-              <a:t>θ</a:t>
-            </a:r>
-            <a:r>
-              <a:rPr lang="en-US" dirty="0"/>
-              <a:t> = X.</a:t>
-            </a:r>
-          </a:p>
-          <a:p>
-            <a:endParaRPr lang="en-US" dirty="0"/>
-          </a:p>
-          <a:p>
-            <a:r>
-              <a:rPr lang="en-US" dirty="0"/>
-              <a:t>But if we estimate </a:t>
-            </a:r>
-            <a:r>
-              <a:rPr lang="el-GR" dirty="0"/>
-              <a:t>θ</a:t>
-            </a:r>
-            <a:r>
-              <a:rPr lang="en-US" dirty="0"/>
-              <a:t> from X - then we will generally get different estimate of </a:t>
-            </a:r>
-            <a:r>
-              <a:rPr lang="el-GR" dirty="0"/>
-              <a:t>θ</a:t>
-            </a:r>
-            <a:r>
-              <a:rPr lang="en-US" dirty="0"/>
-              <a:t>. JS estimator shrinkage is derived by finding estimators of the form </a:t>
-            </a:r>
-          </a:p>
-          <a:p>
-            <a:r>
-              <a:rPr lang="en-US" dirty="0"/>
-              <a:t>    </a:t>
-            </a:r>
-            <a:r>
-              <a:rPr lang="el-GR" dirty="0"/>
-              <a:t>θ</a:t>
-            </a:r>
-            <a:r>
-              <a:rPr lang="en-US" baseline="-25000" dirty="0" err="1"/>
-              <a:t>i</a:t>
-            </a:r>
-            <a:r>
-              <a:rPr lang="en-US" dirty="0"/>
-              <a:t> = </a:t>
+          </a:p>
+          <a:p>
+            <a:r>
+              <a:rPr lang="en-US" dirty="0"/>
+              <a:t>In this "Scientific American" article, </a:t>
             </a:r>
             <a:r>
               <a:rPr lang="en-US" dirty="0" err="1"/>
-              <a:t>a+b·X</a:t>
-            </a:r>
-            <a:r>
-              <a:rPr lang="en-US" baseline="-25000" dirty="0" err="1"/>
-              <a:t>i</a:t>
-            </a:r>
-            <a:endParaRPr lang="en-US" baseline="-25000" dirty="0"/>
-          </a:p>
-          <a:p>
-            <a:r>
-              <a:rPr lang="en-US" dirty="0"/>
-              <a:t>and finding values of a and b that minimize loss.</a:t>
+              <a:t>Efron</a:t>
+            </a:r>
+            <a:r>
+              <a:rPr lang="en-US" dirty="0"/>
+              <a:t> explained the paradox with a baseball example: while most people would think the best prediction for the end-of-season batting averages of 10 players would be obtained by looking at each player's early average, the James-Stein theorem showed that including other players' averages leads to a better result. This is a paradox because players' individual performances shouldn't influence each other. </a:t>
+            </a:r>
+          </a:p>
+        </p:txBody>
+      </p:sp>
+      <p:sp>
+        <p:nvSpPr>
+          <p:cNvPr id="3" name="TextBox 2">
+            <a:extLst>
+              <a:ext uri="{FF2B5EF4-FFF2-40B4-BE49-F238E27FC236}">
+                <a16:creationId xmlns:a16="http://schemas.microsoft.com/office/drawing/2014/main" id="{35DF5690-79DC-E24F-A4C6-C4036FF65217}"/>
+              </a:ext>
+            </a:extLst>
+          </p:cNvPr>
+          <p:cNvSpPr txBox="1"/>
+          <p:nvPr/>
+        </p:nvSpPr>
+        <p:spPr>
+          <a:xfrm>
+            <a:off x="7786130" y="3594695"/>
+            <a:ext cx="4188940" cy="950583"/>
+          </a:xfrm>
+          <a:prstGeom prst="rect">
+            <a:avLst/>
+          </a:prstGeom>
+          <a:noFill/>
+        </p:spPr>
+        <p:txBody>
+          <a:bodyPr wrap="square" rtlCol="0">
+            <a:spAutoFit/>
+          </a:bodyPr>
+          <a:lstStyle/>
+          <a:p>
+            <a:r>
+              <a:rPr lang="en-US" dirty="0"/>
+              <a:t>The picture above shows the shrinking of individual batting averages toward the overall "average of averages" by ~80% .</a:t>
             </a:r>
           </a:p>
         </p:txBody>
@@ -5090,7 +5188,7 @@
     </p:spTree>
     <p:extLst>
       <p:ext uri="{BB962C8B-B14F-4D97-AF65-F5344CB8AC3E}">
-        <p14:creationId xmlns:p14="http://schemas.microsoft.com/office/powerpoint/2010/main" val="3146839931"/>
+        <p14:creationId xmlns:p14="http://schemas.microsoft.com/office/powerpoint/2010/main" val="3468902571"/>
       </p:ext>
     </p:extLst>
   </p:cSld>
